--- a/content/Lectures/Semester 1/Week 08 - Networks - Shortest Paths and MST/5 Source Files/Dijkstra Algorithm.pptx
+++ b/content/Lectures/Semester 1/Week 08 - Networks - Shortest Paths and MST/5 Source Files/Dijkstra Algorithm.pptx
@@ -9505,7 +9505,7 @@
               <a:rPr lang="en-US" sz="2800">
                 <a:cs typeface="Arial" charset="0"/>
               </a:rPr>
-              <a:t>Using a binary heap, all these opeartions run in O(log n) time, so total is O(m log n).</a:t>
+              <a:t>Using a binary heap, all these operations run in O(log n) time, so total is O(m log n).</a:t>
             </a:r>
           </a:p>
         </p:txBody>
@@ -32163,7 +32163,7 @@
               <a:rPr lang="en-US" sz="2400" dirty="0" err="1">
                 <a:cs typeface="Arial" charset="0"/>
               </a:rPr>
-              <a:t>Pagerank</a:t>
+              <a:t>PageRank</a:t>
             </a:r>
             <a:r>
               <a:rPr lang="en-US" sz="2400" dirty="0">
